--- a/presentation/عرض_المشروع_الكامل_للمناقشة.pptx
+++ b/presentation/عرض_المشروع_الكامل_للمناقشة.pptx
@@ -3215,7 +3215,7 @@
               </a:defRPr>
             </a:pPr>
             <a:r>
-              <a:t>مساعد تدقيق الامتثال التنظيمي</a:t>
+              <a:t>مساعد تدقيق الامتثال التنظيمي (رقيب)</a:t>
             </a:r>
           </a:p>
           <a:p>
